--- a/Topic_E/Exam_Practice/TE-L07_Writing_Workshop_National_Festivals_and_Traditions.pptx
+++ b/Topic_E/Exam_Practice/TE-L07_Writing_Workshop_National_Festivals_and_Traditions.pptx
@@ -784,7 +784,11 @@
           <a:lstStyle/>
           <a:p>
             <a:r>
-              <a:rPr lang="en-US" dirty="0"/>
+              <a:rPr lang="ar-SA" dirty="0">
+                <a:latin typeface="Amiri" pitchFamily="2" charset="-78"/>
+                <a:ea typeface="Amiri" pitchFamily="2" charset="-78"/>
+                <a:cs typeface="Amiri" pitchFamily="2" charset="-78"/>
+              </a:rPr>
               <a:t>Q3 (3 min to choose and read). Title (أ) suits Core and Develop; title (ب) suits Stretch.</a:t>
             </a:r>
             <a:endParaRPr lang="en-US" dirty="0"/>
@@ -1403,7 +1407,11 @@
           <a:lstStyle/>
           <a:p>
             <a:r>
-              <a:rPr lang="en-US" dirty="0"/>
+              <a:rPr lang="ar-SA" dirty="0">
+                <a:latin typeface="Amiri" pitchFamily="2" charset="-78"/>
+                <a:ea typeface="Amiri" pitchFamily="2" charset="-78"/>
+                <a:cs typeface="Amiri" pitchFamily="2" charset="-78"/>
+              </a:rPr>
               <a:t>WELCOME (1 min) — while students join.
 • Greet each student by name as they arrive: السَّلَامُ عَلَيْكُمْ. Take the register (Pastoral Tracker: attendance 0/1).
 • 2-MINUTE CHECK-IN (SEND training): a private chat to any student who seemed unsettled last lesson — “Are you okay today? 👍 / 👎”.
@@ -1672,7 +1680,11 @@
           <a:lstStyle/>
           <a:p>
             <a:r>
-              <a:rPr lang="en-US" dirty="0"/>
+              <a:rPr lang="ar-SA" dirty="0">
+                <a:latin typeface="Amiri" pitchFamily="2" charset="-78"/>
+                <a:ea typeface="Amiri" pitchFamily="2" charset="-78"/>
+                <a:cs typeface="Amiri" pitchFamily="2" charset="-78"/>
+              </a:rPr>
               <a:t>QUESTION 1 — FORM FILLING. About 8 minutes. Core: boxes 1–6. Develop / Stretch: all 8. Box 5 takes a verbal noun (tazyīn). Box 8: tuʿraḍu, tuqaddamu (passive). A girl writes حَضَرْتِهِ in the box-7 heading.</a:t>
             </a:r>
             <a:endParaRPr lang="en-US" dirty="0"/>
@@ -1936,7 +1948,11 @@
           <a:lstStyle/>
           <a:p>
             <a:r>
-              <a:rPr lang="en-US" dirty="0"/>
+              <a:rPr lang="ar-SA" dirty="0">
+                <a:latin typeface="Amiri" pitchFamily="2" charset="-78"/>
+                <a:ea typeface="Amiri" pitchFamily="2" charset="-78"/>
+                <a:cs typeface="Amiri" pitchFamily="2" charset="-78"/>
+              </a:rPr>
               <a:t>Question words: مَتَى يُحْتَفَلُ بِهِ (when is it celebrated — PASSIVE) · مَاذَا حَدَثَ (what happened — PAST) · قَارِنْ (compare!) · خِطَطُكَ (plans — FUTURE).</a:t>
             </a:r>
             <a:endParaRPr lang="en-US" dirty="0"/>
@@ -2508,6 +2524,7 @@
                   <a:srgbClr val="D4AF37"/>
                 </a:solidFill>
                 <a:latin typeface="Amiri" pitchFamily="2" charset="-78"/>
+                <a:ea typeface="Amiri" pitchFamily="2" charset="-78"/>
                 <a:cs typeface="Amiri" pitchFamily="2" charset="-78"/>
               </a:rPr>
               <a:t>م</a:t>
@@ -2714,6 +2731,7 @@
                   <a:srgbClr val="D4AF37"/>
                 </a:solidFill>
                 <a:latin typeface="Amiri" pitchFamily="2" charset="-78"/>
+                <a:ea typeface="Amiri" pitchFamily="2" charset="-78"/>
                 <a:cs typeface="Amiri" pitchFamily="2" charset="-78"/>
               </a:rPr>
               <a:t>وَرْشَةُ الكِتَابَةِ — الأَعْيَادُ الوَطَنِيَّةُ وَالتَّقَالِيدُ</a:t>
@@ -3171,6 +3189,7 @@
                   <a:srgbClr val="D4AF37"/>
                 </a:solidFill>
                 <a:latin typeface="Amiri" pitchFamily="2" charset="-78"/>
+                <a:ea typeface="Amiri" pitchFamily="2" charset="-78"/>
                 <a:cs typeface="Amiri" pitchFamily="2" charset="-78"/>
               </a:rPr>
               <a:t>م</a:t>
@@ -3491,6 +3510,7 @@
                   <a:srgbClr val="8A6D1E"/>
                 </a:solidFill>
                 <a:latin typeface="Amiri" pitchFamily="2" charset="-78"/>
+                <a:ea typeface="Amiri" pitchFamily="2" charset="-78"/>
                 <a:cs typeface="Amiri" pitchFamily="2" charset="-78"/>
               </a:rPr>
               <a:t>نَمُوذَجُ الإِجَابَةِ</a:t>
@@ -3604,6 +3624,7 @@
                   <a:srgbClr val="1F2A37"/>
                 </a:solidFill>
                 <a:latin typeface="Amiri" pitchFamily="2" charset="-78"/>
+                <a:ea typeface="Amiri" pitchFamily="2" charset="-78"/>
                 <a:cs typeface="Amiri" pitchFamily="2" charset="-78"/>
               </a:rPr>
               <a:t>مَرْحَبًا يَا فَيْصَلُ،</a:t>
@@ -3623,6 +3644,7 @@
                   <a:srgbClr val="1F2A37"/>
                 </a:solidFill>
                 <a:latin typeface="Amiri" pitchFamily="2" charset="-78"/>
+                <a:ea typeface="Amiri" pitchFamily="2" charset="-78"/>
                 <a:cs typeface="Amiri" pitchFamily="2" charset="-78"/>
               </a:rPr>
               <a:t>كَيْفَ حَالُكَ؟ أَنَا الآنَ فِي دُبَيّ عِنْدَ خَالِي، وَحَضَرْتُ أَمْسِ اليَوْمَ الوَطَنِيَّ لِلْإِمَارَاتِ. يُحْتَفَلُ بِهِ فِي الثَّانِي مِنْ دِيسَمْبِرَ كُلَّ سَنَةٍ. فِي الصَّبَاحِ رُفِعَتِ الأَعْلَامُ فِي كُلِّ مَكَانٍ، وَزُيِّنَتِ الشَّوَارِعُ بِالأَضْوَاءِ. ثُمَّ شَاهَدْنَا اسْتِعْرَاضًا كَبِيرًا وَرَقْصَةً شَعْبِيَّةً. فِي اللَّيْلِ أُطْلِقَتْ أَلْعَابٌ نَارِيَّةٌ رَائِعَةٌ. هٰذَا الاحْتِفَالُ أَكْبَرُ مِنْ لَيْلَةِ الأَلْعَابِ النَّارِيَّةِ عِنْدَنَا، وَأَكْثَرُ حَمَاسًا. أَعْجَبَنِي كَثِيرًا، لِأَنَّ النَّاسَ كَانُوا سُعَدَاءَ جِدًّا. فِي السَّنَةِ القَادِمَةِ سَأَحْضُرُهُ مَرَّةً أُخْرَى. وَأَنْتَ، هَلْ حَضَرْتَ احْتِفَالًا وَطَنِيًّا؟</a:t>
@@ -3642,6 +3664,7 @@
                   <a:srgbClr val="1F2A37"/>
                 </a:solidFill>
                 <a:latin typeface="Amiri" pitchFamily="2" charset="-78"/>
+                <a:ea typeface="Amiri" pitchFamily="2" charset="-78"/>
                 <a:cs typeface="Amiri" pitchFamily="2" charset="-78"/>
               </a:rPr>
               <a:t>إِلَى اللِّقَاءِ،</a:t>
@@ -3661,6 +3684,7 @@
                   <a:srgbClr val="1F2A37"/>
                 </a:solidFill>
                 <a:latin typeface="Amiri" pitchFamily="2" charset="-78"/>
+                <a:ea typeface="Amiri" pitchFamily="2" charset="-78"/>
                 <a:cs typeface="Amiri" pitchFamily="2" charset="-78"/>
               </a:rPr>
               <a:t>خَالِدٌ</a:t>
@@ -3824,11 +3848,12 @@
               <a:buNone/>
             </a:pPr>
             <a:r>
-              <a:rPr lang="en-US" sz="950" b="1" dirty="0">
+              <a:rPr lang="ar-SA" sz="950" b="1" dirty="0">
                 <a:solidFill>
                   <a:srgbClr val="FFFFFF"/>
                 </a:solidFill>
                 <a:latin typeface="Calibri" pitchFamily="34" charset="0"/>
+                <a:ea typeface="Amiri" pitchFamily="2" charset="-78"/>
                 <a:cs typeface="Amiri" pitchFamily="2" charset="-78"/>
               </a:rPr>
               <a:t>يُحْتَفَلُ بِهِ</a:t>
@@ -3889,11 +3914,12 @@
               <a:buNone/>
             </a:pPr>
             <a:r>
-              <a:rPr lang="en-US" sz="950" b="1" dirty="0">
+              <a:rPr lang="ar-SA" sz="950" b="1" dirty="0">
                 <a:solidFill>
                   <a:srgbClr val="FFFFFF"/>
                 </a:solidFill>
                 <a:latin typeface="Calibri" pitchFamily="34" charset="0"/>
+                <a:ea typeface="Amiri" pitchFamily="2" charset="-78"/>
                 <a:cs typeface="Amiri" pitchFamily="2" charset="-78"/>
               </a:rPr>
               <a:t>رُفِعَتِ الأَعْلَامُ</a:t>
@@ -3954,11 +3980,12 @@
               <a:buNone/>
             </a:pPr>
             <a:r>
-              <a:rPr lang="en-US" sz="950" b="1" dirty="0">
+              <a:rPr lang="ar-SA" sz="950" b="1" dirty="0">
                 <a:solidFill>
                   <a:srgbClr val="FFFFFF"/>
                 </a:solidFill>
                 <a:latin typeface="Calibri" pitchFamily="34" charset="0"/>
+                <a:ea typeface="Amiri" pitchFamily="2" charset="-78"/>
                 <a:cs typeface="Amiri" pitchFamily="2" charset="-78"/>
               </a:rPr>
               <a:t>أُطْلِقَتْ</a:t>
@@ -4019,11 +4046,12 @@
               <a:buNone/>
             </a:pPr>
             <a:r>
-              <a:rPr lang="en-US" sz="950" b="1" dirty="0">
+              <a:rPr lang="ar-SA" sz="950" b="1" dirty="0">
                 <a:solidFill>
                   <a:srgbClr val="FFFFFF"/>
                 </a:solidFill>
                 <a:latin typeface="Calibri" pitchFamily="34" charset="0"/>
+                <a:ea typeface="Amiri" pitchFamily="2" charset="-78"/>
                 <a:cs typeface="Amiri" pitchFamily="2" charset="-78"/>
               </a:rPr>
               <a:t>أَكْبَرُ مِنْ</a:t>
@@ -4157,6 +4185,7 @@
                   <a:srgbClr val="D4AF37"/>
                 </a:solidFill>
                 <a:latin typeface="Amiri" pitchFamily="2" charset="-78"/>
+                <a:ea typeface="Amiri" pitchFamily="2" charset="-78"/>
                 <a:cs typeface="Amiri" pitchFamily="2" charset="-78"/>
               </a:rPr>
               <a:t>م</a:t>
@@ -4477,6 +4506,7 @@
                   <a:srgbClr val="8A6D1E"/>
                 </a:solidFill>
                 <a:latin typeface="Amiri" pitchFamily="2" charset="-78"/>
+                <a:ea typeface="Amiri" pitchFamily="2" charset="-78"/>
                 <a:cs typeface="Amiri" pitchFamily="2" charset="-78"/>
               </a:rPr>
               <a:t>نَمُوذَجُ الإِجَابَةِ</a:t>
@@ -4590,6 +4620,7 @@
                   <a:srgbClr val="1F2A37"/>
                 </a:solidFill>
                 <a:latin typeface="Amiri" pitchFamily="2" charset="-78"/>
+                <a:ea typeface="Amiri" pitchFamily="2" charset="-78"/>
                 <a:cs typeface="Amiri" pitchFamily="2" charset="-78"/>
               </a:rPr>
               <a:t>عَزِيزِي فَيْصَلُ،</a:t>
@@ -4609,6 +4640,7 @@
                   <a:srgbClr val="1F2A37"/>
                 </a:solidFill>
                 <a:latin typeface="Amiri" pitchFamily="2" charset="-78"/>
+                <a:ea typeface="Amiri" pitchFamily="2" charset="-78"/>
                 <a:cs typeface="Amiri" pitchFamily="2" charset="-78"/>
               </a:rPr>
               <a:t>أَكْتُبُ إِلَيْكَ مِنْ دُبَيّ، حَيْثُ أَقْضِي عُطْلَتِي عِنْدَ خَالِي، وَقَدْ صَادَفَتْ زِيَارَتِي اليَوْمَ الوَطَنِيَّ لِلْإِمَارَاتِ، الَّذِي يُحْتَفَلُ بِهِ فِي الثَّانِي مِنْ دِيسَمْبِرَ إِحْيَاءً لِذِكْرَى قِيَامِ الاتِّحَادِ. مُنْذُ الصَّبَاحِ زُيِّنَتِ الأَبْرَاجُ بِأَلْوَانِ العَلَمِ، وَخَرَجَتِ العَائِلَاتُ بِسَيَّارَاتٍ مُزَيَّنَةٍ، ثُمَّ أُقِيمَ اسْتِعْرَاضٌ رَقَصَ فِيهِ الرِّجَالُ العَيَّالَةَ بِالعِصِيِّ. وَحِينَ أُطْلِقَتِ الأَلْعَابُ النَّارِيَّةُ فَوْقَ البَحْرِ، شَعَرْتُ أَنَّهَا أَضْخَمُ بِكَثِيرٍ مِنْ أَيِّ احْتِفَالٍ رَأَيْتُهُ فِي لَنْدَنَ. صَحِيحٌ أَنَّ الزِّحَامَ كَانَ شَدِيدًا، غَيْرَ أَنَّ فَرْحَةَ النَّاسِ عَوَّضَتْ كُلَّ شَيْءٍ. وَإِذَا سَمَحَ لِي أَبِي، فَسَأَعُودُ فِي العَامِ القَادِمِ. أَلَا تَأْتِي مَعِي؟</a:t>
@@ -4628,6 +4660,7 @@
                   <a:srgbClr val="1F2A37"/>
                 </a:solidFill>
                 <a:latin typeface="Amiri" pitchFamily="2" charset="-78"/>
+                <a:ea typeface="Amiri" pitchFamily="2" charset="-78"/>
                 <a:cs typeface="Amiri" pitchFamily="2" charset="-78"/>
               </a:rPr>
               <a:t>مَعَ تَحِيَّاتِي،</a:t>
@@ -4647,6 +4680,7 @@
                   <a:srgbClr val="1F2A37"/>
                 </a:solidFill>
                 <a:latin typeface="Amiri" pitchFamily="2" charset="-78"/>
+                <a:ea typeface="Amiri" pitchFamily="2" charset="-78"/>
                 <a:cs typeface="Amiri" pitchFamily="2" charset="-78"/>
               </a:rPr>
               <a:t>خَالِدٌ</a:t>
@@ -4810,11 +4844,12 @@
               <a:buNone/>
             </a:pPr>
             <a:r>
-              <a:rPr lang="en-US" sz="950" b="1" dirty="0">
+              <a:rPr lang="ar-SA" sz="950" b="1" dirty="0">
                 <a:solidFill>
                   <a:srgbClr val="FFFFFF"/>
                 </a:solidFill>
                 <a:latin typeface="Calibri" pitchFamily="34" charset="0"/>
+                <a:ea typeface="Amiri" pitchFamily="2" charset="-78"/>
                 <a:cs typeface="Amiri" pitchFamily="2" charset="-78"/>
               </a:rPr>
               <a:t>صَادَفَتْ زِيَارَتِي</a:t>
@@ -4875,11 +4910,12 @@
               <a:buNone/>
             </a:pPr>
             <a:r>
-              <a:rPr lang="en-US" sz="950" b="1" dirty="0">
+              <a:rPr lang="ar-SA" sz="950" b="1" dirty="0">
                 <a:solidFill>
                   <a:srgbClr val="FFFFFF"/>
                 </a:solidFill>
                 <a:latin typeface="Calibri" pitchFamily="34" charset="0"/>
+                <a:ea typeface="Amiri" pitchFamily="2" charset="-78"/>
                 <a:cs typeface="Amiri" pitchFamily="2" charset="-78"/>
               </a:rPr>
               <a:t>إِحْيَاءً لِذِكْرَى</a:t>
@@ -4940,11 +4976,12 @@
               <a:buNone/>
             </a:pPr>
             <a:r>
-              <a:rPr lang="en-US" sz="950" b="1" dirty="0">
+              <a:rPr lang="ar-SA" sz="950" b="1" dirty="0">
                 <a:solidFill>
                   <a:srgbClr val="FFFFFF"/>
                 </a:solidFill>
                 <a:latin typeface="Calibri" pitchFamily="34" charset="0"/>
+                <a:ea typeface="Amiri" pitchFamily="2" charset="-78"/>
                 <a:cs typeface="Amiri" pitchFamily="2" charset="-78"/>
               </a:rPr>
               <a:t>أُقِيمَ اسْتِعْرَاضٌ رَقَصَ فِيهِ</a:t>
@@ -5005,11 +5042,12 @@
               <a:buNone/>
             </a:pPr>
             <a:r>
-              <a:rPr lang="en-US" sz="950" b="1" dirty="0">
+              <a:rPr lang="ar-SA" sz="950" b="1" dirty="0">
                 <a:solidFill>
                   <a:srgbClr val="FFFFFF"/>
                 </a:solidFill>
                 <a:latin typeface="Calibri" pitchFamily="34" charset="0"/>
+                <a:ea typeface="Amiri" pitchFamily="2" charset="-78"/>
                 <a:cs typeface="Amiri" pitchFamily="2" charset="-78"/>
               </a:rPr>
               <a:t>أَضْخَمُ بِكَثِيرٍ مِنْ</a:t>
@@ -5143,6 +5181,7 @@
                   <a:srgbClr val="D4AF37"/>
                 </a:solidFill>
                 <a:latin typeface="Amiri" pitchFamily="2" charset="-78"/>
+                <a:ea typeface="Amiri" pitchFamily="2" charset="-78"/>
                 <a:cs typeface="Amiri" pitchFamily="2" charset="-78"/>
               </a:rPr>
               <a:t>م</a:t>
@@ -5463,6 +5502,7 @@
                   <a:srgbClr val="8A6D1E"/>
                 </a:solidFill>
                 <a:latin typeface="Amiri" pitchFamily="2" charset="-78"/>
+                <a:ea typeface="Amiri" pitchFamily="2" charset="-78"/>
                 <a:cs typeface="Amiri" pitchFamily="2" charset="-78"/>
               </a:rPr>
               <a:t>اخْتَرْ عُنْوَانًا وَاحِدًا</a:t>
@@ -5743,6 +5783,7 @@
                   <a:srgbClr val="1B3B6F"/>
                 </a:solidFill>
                 <a:latin typeface="Amiri" pitchFamily="2" charset="-78"/>
+                <a:ea typeface="Amiri" pitchFamily="2" charset="-78"/>
                 <a:cs typeface="Amiri" pitchFamily="2" charset="-78"/>
               </a:rPr>
               <a:t>احْتِفَالٌ وَطَنِيٌّ أُحِبُّهُ</a:t>
@@ -5781,6 +5822,7 @@
                   <a:srgbClr val="1B3B6F"/>
                 </a:solidFill>
                 <a:latin typeface="Amiri" pitchFamily="2" charset="-78"/>
+                <a:ea typeface="Amiri" pitchFamily="2" charset="-78"/>
                 <a:cs typeface="Amiri" pitchFamily="2" charset="-78"/>
               </a:rPr>
               <a:t>(أ)</a:t>
@@ -5887,6 +5929,7 @@
                   <a:srgbClr val="1B3B6F"/>
                 </a:solidFill>
                 <a:latin typeface="Amiri" pitchFamily="2" charset="-78"/>
+                <a:ea typeface="Amiri" pitchFamily="2" charset="-78"/>
                 <a:cs typeface="Amiri" pitchFamily="2" charset="-78"/>
               </a:rPr>
               <a:t>مَا الاحْتِفَالُ وَمَتَى يُحْتَفَلُ بِهِ · مَاذَا يُفْعَلُ فِيهِ · احْتِفَالٌ حَضَرْتَهُ · مُقَارَنَةٌ وَخُطَطُكَ</a:t>
@@ -6018,6 +6061,7 @@
                   <a:srgbClr val="1B3B6F"/>
                 </a:solidFill>
                 <a:latin typeface="Amiri" pitchFamily="2" charset="-78"/>
+                <a:ea typeface="Amiri" pitchFamily="2" charset="-78"/>
                 <a:cs typeface="Amiri" pitchFamily="2" charset="-78"/>
               </a:rPr>
               <a:t>هَلْ تَسْتَحِقُّ الاحْتِفَالَاتُ الوَطَنِيَّةُ كُلَّ هٰذِهِ الأَمْوَالِ؟</a:t>
@@ -6056,6 +6100,7 @@
                   <a:srgbClr val="1B3B6F"/>
                 </a:solidFill>
                 <a:latin typeface="Amiri" pitchFamily="2" charset="-78"/>
+                <a:ea typeface="Amiri" pitchFamily="2" charset="-78"/>
                 <a:cs typeface="Amiri" pitchFamily="2" charset="-78"/>
               </a:rPr>
               <a:t>(ب)</a:t>
@@ -6159,6 +6204,7 @@
                   <a:srgbClr val="1B3B6F"/>
                 </a:solidFill>
                 <a:latin typeface="Amiri" pitchFamily="2" charset="-78"/>
+                <a:ea typeface="Amiri" pitchFamily="2" charset="-78"/>
                 <a:cs typeface="Amiri" pitchFamily="2" charset="-78"/>
               </a:rPr>
               <a:t>المَوْضُوعُ · الفَوَائِدُ وَالتَّكَالِيفُ · مِثَالٌ مِنْ مَدِينَتِكَ · رَأْيُكَ</a:t>
@@ -6358,6 +6404,7 @@
                   <a:srgbClr val="D4AF37"/>
                 </a:solidFill>
                 <a:latin typeface="Amiri" pitchFamily="2" charset="-78"/>
+                <a:ea typeface="Amiri" pitchFamily="2" charset="-78"/>
                 <a:cs typeface="Amiri" pitchFamily="2" charset="-78"/>
               </a:rPr>
               <a:t>م</a:t>
@@ -6678,6 +6725,7 @@
                   <a:srgbClr val="8A6D1E"/>
                 </a:solidFill>
                 <a:latin typeface="Amiri" pitchFamily="2" charset="-78"/>
+                <a:ea typeface="Amiri" pitchFamily="2" charset="-78"/>
                 <a:cs typeface="Amiri" pitchFamily="2" charset="-78"/>
               </a:rPr>
               <a:t>خُطَّةُ الكِتَابَةِ</a:t>
@@ -7302,6 +7350,7 @@
                   <a:srgbClr val="1B3B6F"/>
                 </a:solidFill>
                 <a:latin typeface="Amiri" pitchFamily="2" charset="-78"/>
+                <a:ea typeface="Amiri" pitchFamily="2" charset="-78"/>
                 <a:cs typeface="Amiri" pitchFamily="2" charset="-78"/>
               </a:rPr>
               <a:t>تُرْفَعُ الأَعْلَامُ، وَتُطْلَقُ الأَلْعَابُ النَّارِيَّةُ.</a:t>
@@ -7401,6 +7450,7 @@
                   <a:srgbClr val="1B3B6F"/>
                 </a:solidFill>
                 <a:latin typeface="Amiri" pitchFamily="2" charset="-78"/>
+                <a:ea typeface="Amiri" pitchFamily="2" charset="-78"/>
                 <a:cs typeface="Amiri" pitchFamily="2" charset="-78"/>
               </a:rPr>
               <a:t>احْتَفَلْتُ بِهِ فِي الرِّيَاضِ مَعَ جَدِّي.</a:t>
@@ -7500,6 +7550,7 @@
                   <a:srgbClr val="1B3B6F"/>
                 </a:solidFill>
                 <a:latin typeface="Amiri" pitchFamily="2" charset="-78"/>
+                <a:ea typeface="Amiri" pitchFamily="2" charset="-78"/>
                 <a:cs typeface="Amiri" pitchFamily="2" charset="-78"/>
               </a:rPr>
               <a:t>هٰذَا الاحْتِفَالُ أَكْبَرُ وَأَكْثَرُ حَمَاسًا.</a:t>
@@ -7661,6 +7712,7 @@
                   <a:srgbClr val="1F2A37"/>
                 </a:solidFill>
                 <a:latin typeface="Amiri" pitchFamily="2" charset="-78"/>
+                <a:ea typeface="Amiri" pitchFamily="2" charset="-78"/>
                 <a:cs typeface="Amiri" pitchFamily="2" charset="-78"/>
               </a:rPr>
               <a:t>أ</a:t>
@@ -7687,6 +7739,7 @@
                   <a:srgbClr val="1F2A37"/>
                 </a:solidFill>
                 <a:latin typeface="Amiri" pitchFamily="2" charset="-78"/>
+                <a:ea typeface="Amiri" pitchFamily="2" charset="-78"/>
                 <a:cs typeface="Amiri" pitchFamily="2" charset="-78"/>
               </a:rPr>
               <a:t>ب</a:t>
@@ -7833,6 +7886,7 @@
                   <a:srgbClr val="D4AF37"/>
                 </a:solidFill>
                 <a:latin typeface="Amiri" pitchFamily="2" charset="-78"/>
+                <a:ea typeface="Amiri" pitchFamily="2" charset="-78"/>
                 <a:cs typeface="Amiri" pitchFamily="2" charset="-78"/>
               </a:rPr>
               <a:t>م</a:t>
@@ -8090,6 +8144,7 @@
                   <a:srgbClr val="8A6D1E"/>
                 </a:solidFill>
                 <a:latin typeface="Amiri" pitchFamily="2" charset="-78"/>
+                <a:ea typeface="Amiri" pitchFamily="2" charset="-78"/>
                 <a:cs typeface="Amiri" pitchFamily="2" charset="-78"/>
               </a:rPr>
               <a:t>أ</a:t>
@@ -8154,6 +8209,7 @@
                   <a:srgbClr val="1B3B6F"/>
                 </a:solidFill>
                 <a:latin typeface="Amiri" pitchFamily="2" charset="-78"/>
+                <a:ea typeface="Amiri" pitchFamily="2" charset="-78"/>
                 <a:cs typeface="Amiri" pitchFamily="2" charset="-78"/>
               </a:rPr>
               <a:t>أ</a:t>
@@ -8205,6 +8261,7 @@
                   <a:srgbClr val="8A6D1E"/>
                 </a:solidFill>
                 <a:latin typeface="Amiri" pitchFamily="2" charset="-78"/>
+                <a:ea typeface="Amiri" pitchFamily="2" charset="-78"/>
                 <a:cs typeface="Amiri" pitchFamily="2" charset="-78"/>
               </a:rPr>
               <a:t>نَمُوذَجُ الإِجَابَةِ</a:t>
@@ -8318,6 +8375,7 @@
                   <a:srgbClr val="1F2A37"/>
                 </a:solidFill>
                 <a:latin typeface="Amiri" pitchFamily="2" charset="-78"/>
+                <a:ea typeface="Amiri" pitchFamily="2" charset="-78"/>
                 <a:cs typeface="Amiri" pitchFamily="2" charset="-78"/>
               </a:rPr>
               <a:t>أَصْلُ أُسْرَتِي مِنَ السُّعُودِيَّةِ، وَأَعِيشُ فِي بَرِيطَانْيَا. التَّقْلِيدُ الوَطَنِيُّ الَّذِي أُحِبُّهُ أَكْثَرَ هُوَ اليَوْمُ الوَطَنِيُّ السُّعُودِيُّ. يُحْتَفَلُ بِهِ فِي الثَّالِثِ وَالعِشْرِينَ مِنْ سِبْتَمْبِرَ كُلَّ عَامٍ.</a:t>
@@ -8337,6 +8395,7 @@
                   <a:srgbClr val="1F2A37"/>
                 </a:solidFill>
                 <a:latin typeface="Amiri" pitchFamily="2" charset="-78"/>
+                <a:ea typeface="Amiri" pitchFamily="2" charset="-78"/>
                 <a:cs typeface="Amiri" pitchFamily="2" charset="-78"/>
               </a:rPr>
               <a:t>فِي هٰذَا اليَوْمِ تُرْفَعُ الأَعْلَامُ الخَضْرَاءُ، وَتُزَيَّنُ الشَّوَارِعُ وَالبُيُوتُ بِالأَضْوَاءِ. يَلْبَسُ النَّاسُ المَلَابِسَ التَّقْلِيدِيَّةَ، وَيَرْقُصُ الرِّجَالُ العَرْضَةَ بِالسُّيُوفِ. فِي اللَّيْلِ تُطْلَقُ الأَلْعَابُ النَّارِيَّةُ فِي كُلِّ المُدُنِ، وَتَمْتَلِئُ السَّمَاءُ بِالأَلْوَانِ.</a:t>
@@ -8356,6 +8415,7 @@
                   <a:srgbClr val="1F2A37"/>
                 </a:solidFill>
                 <a:latin typeface="Amiri" pitchFamily="2" charset="-78"/>
+                <a:ea typeface="Amiri" pitchFamily="2" charset="-78"/>
                 <a:cs typeface="Amiri" pitchFamily="2" charset="-78"/>
               </a:rPr>
               <a:t>فِي السَّنَةِ المَاضِيَةِ احْتَفَلْتُ بِهِ فِي الرِّيَاضِ مَعَ جَدِّي. ذَهَبْنَا إِلَى حَدِيقَةٍ كَبِيرَةٍ، وَشَاهَدْنَا عَرْضًا لِلطَّائِرَاتِ، وَأَكَلْنَا الكَبْسَةَ مَعَ أَقَارِبِي فِي المَسَاءِ. كَانَ الجَوُّ حَارًّا، وَمَعَ ذٰلِكَ كَانَ اليَوْمُ رَائِعًا.</a:t>
@@ -8375,6 +8435,7 @@
                   <a:srgbClr val="1F2A37"/>
                 </a:solidFill>
                 <a:latin typeface="Amiri" pitchFamily="2" charset="-78"/>
+                <a:ea typeface="Amiri" pitchFamily="2" charset="-78"/>
                 <a:cs typeface="Amiri" pitchFamily="2" charset="-78"/>
               </a:rPr>
               <a:t>أَظُنُّ أَنَّ هٰذَا الاحْتِفَالَ أَكْبَرُ مِنْ لَيْلَةِ الأَلْعَابِ النَّارِيَّةِ فِي بَرِيطَانْيَا، وَأَكْثَرُ حَمَاسًا. لٰكِنَّ الاحْتِفَالَ البَرِيطَانِيَّ أَقْدَمُ، لِأَنَّهُ يَعُودُ إِلَى أَكْثَرَ مِنْ أَرْبَعِمِئَةِ سَنَةٍ. فِي المُسْتَقْبَلِ سَأَحْتَفِلُ بِهِ مَعَ أَوْلَادِي، لِأَنَّهُ جُزْءٌ مِنْ هُوِيَّتِي.</a:t>
@@ -8538,11 +8599,12 @@
               <a:buNone/>
             </a:pPr>
             <a:r>
-              <a:rPr lang="en-US" sz="950" b="1" dirty="0">
+              <a:rPr lang="ar-SA" sz="950" b="1" dirty="0">
                 <a:solidFill>
                   <a:srgbClr val="FFFFFF"/>
                 </a:solidFill>
                 <a:latin typeface="Calibri" pitchFamily="34" charset="0"/>
+                <a:ea typeface="Amiri" pitchFamily="2" charset="-78"/>
                 <a:cs typeface="Amiri" pitchFamily="2" charset="-78"/>
               </a:rPr>
               <a:t>يُحْتَفَلُ بِهِ</a:t>
@@ -8603,11 +8665,12 @@
               <a:buNone/>
             </a:pPr>
             <a:r>
-              <a:rPr lang="en-US" sz="950" b="1" dirty="0">
+              <a:rPr lang="ar-SA" sz="950" b="1" dirty="0">
                 <a:solidFill>
                   <a:srgbClr val="FFFFFF"/>
                 </a:solidFill>
                 <a:latin typeface="Calibri" pitchFamily="34" charset="0"/>
+                <a:ea typeface="Amiri" pitchFamily="2" charset="-78"/>
                 <a:cs typeface="Amiri" pitchFamily="2" charset="-78"/>
               </a:rPr>
               <a:t>تُرْفَعُ الأَعْلَامُ</a:t>
@@ -8668,11 +8731,12 @@
               <a:buNone/>
             </a:pPr>
             <a:r>
-              <a:rPr lang="en-US" sz="950" b="1" dirty="0">
+              <a:rPr lang="ar-SA" sz="950" b="1" dirty="0">
                 <a:solidFill>
                   <a:srgbClr val="FFFFFF"/>
                 </a:solidFill>
                 <a:latin typeface="Calibri" pitchFamily="34" charset="0"/>
+                <a:ea typeface="Amiri" pitchFamily="2" charset="-78"/>
                 <a:cs typeface="Amiri" pitchFamily="2" charset="-78"/>
               </a:rPr>
               <a:t>وَمَعَ ذٰلِكَ</a:t>
@@ -8733,11 +8797,12 @@
               <a:buNone/>
             </a:pPr>
             <a:r>
-              <a:rPr lang="en-US" sz="950" b="1" dirty="0">
+              <a:rPr lang="ar-SA" sz="950" b="1" dirty="0">
                 <a:solidFill>
                   <a:srgbClr val="FFFFFF"/>
                 </a:solidFill>
                 <a:latin typeface="Calibri" pitchFamily="34" charset="0"/>
+                <a:ea typeface="Amiri" pitchFamily="2" charset="-78"/>
                 <a:cs typeface="Amiri" pitchFamily="2" charset="-78"/>
               </a:rPr>
               <a:t>أَكْبَرُ مِنْ</a:t>
@@ -8871,6 +8936,7 @@
                   <a:srgbClr val="D4AF37"/>
                 </a:solidFill>
                 <a:latin typeface="Amiri" pitchFamily="2" charset="-78"/>
+                <a:ea typeface="Amiri" pitchFamily="2" charset="-78"/>
                 <a:cs typeface="Amiri" pitchFamily="2" charset="-78"/>
               </a:rPr>
               <a:t>م</a:t>
@@ -9128,6 +9194,7 @@
                   <a:srgbClr val="8A6D1E"/>
                 </a:solidFill>
                 <a:latin typeface="Amiri" pitchFamily="2" charset="-78"/>
+                <a:ea typeface="Amiri" pitchFamily="2" charset="-78"/>
                 <a:cs typeface="Amiri" pitchFamily="2" charset="-78"/>
               </a:rPr>
               <a:t>أ</a:t>
@@ -9192,6 +9259,7 @@
                   <a:srgbClr val="1B3B6F"/>
                 </a:solidFill>
                 <a:latin typeface="Amiri" pitchFamily="2" charset="-78"/>
+                <a:ea typeface="Amiri" pitchFamily="2" charset="-78"/>
                 <a:cs typeface="Amiri" pitchFamily="2" charset="-78"/>
               </a:rPr>
               <a:t>أ</a:t>
@@ -9243,6 +9311,7 @@
                   <a:srgbClr val="8A6D1E"/>
                 </a:solidFill>
                 <a:latin typeface="Amiri" pitchFamily="2" charset="-78"/>
+                <a:ea typeface="Amiri" pitchFamily="2" charset="-78"/>
                 <a:cs typeface="Amiri" pitchFamily="2" charset="-78"/>
               </a:rPr>
               <a:t>نَمُوذَجُ الإِجَابَةِ</a:t>
@@ -9356,6 +9425,7 @@
                   <a:srgbClr val="1F2A37"/>
                 </a:solidFill>
                 <a:latin typeface="Amiri" pitchFamily="2" charset="-78"/>
+                <a:ea typeface="Amiri" pitchFamily="2" charset="-78"/>
                 <a:cs typeface="Amiri" pitchFamily="2" charset="-78"/>
               </a:rPr>
               <a:t>فِي كُلِّ ثَالِثٍ وَعِشْرِينَ مِنْ سِبْتَمْبِرَ، يَتَحَوَّلُ بَيْتُنَا فِي بَرْمِنْغْهَامَ إِلَى قِطْعَةٍ صَغِيرَةٍ مِنَ السُّعُودِيَّةِ؛ فَتُرْفَعُ الأَعْلَامُ الخَضْرَاءُ عَلَى النَّوَافِذِ، وَتُقَدَّمُ القَهْوَةُ وَالتَّمْرُ لِكُلِّ مَنْ يَزُورُنَا مِنَ الجِيرَانِ وَالأَصْدِقَاءِ، وَتُرْفَعُ أَصْوَاتُ الأَغَانِي الوَطَنِيَّةِ.</a:t>
@@ -9375,6 +9445,7 @@
                   <a:srgbClr val="1F2A37"/>
                 </a:solidFill>
                 <a:latin typeface="Amiri" pitchFamily="2" charset="-78"/>
+                <a:ea typeface="Amiri" pitchFamily="2" charset="-78"/>
                 <a:cs typeface="Amiri" pitchFamily="2" charset="-78"/>
               </a:rPr>
               <a:t>وَيُحْتَفَلُ بِاليَوْمِ الوَطَنِيِّ إِحْيَاءً لِذِكْرَى تَوْحِيدِ المَمْلَكَةِ سَنَةَ أَلْفٍ وَتِسْعِمِئَةٍ وَاثْنَتَيْنِ وَثَلَاثِينَ. وَفِيهِ تُزَيَّنُ المُدُنُ بِالأَضْوَاءِ، وَتُقَامُ عُرُوضُ العَرْضَةِ، وَتُطْلَقُ الأَلْعَابُ النَّارِيَّةُ مِنْ أَعْلَى الأَبْرَاجِ، فَتُضِيءُ السَّمَاءَ سَاعَةً كَامِلَةً.</a:t>
@@ -9394,6 +9465,7 @@
                   <a:srgbClr val="1F2A37"/>
                 </a:solidFill>
                 <a:latin typeface="Amiri" pitchFamily="2" charset="-78"/>
+                <a:ea typeface="Amiri" pitchFamily="2" charset="-78"/>
                 <a:cs typeface="Amiri" pitchFamily="2" charset="-78"/>
               </a:rPr>
               <a:t>غَيْرَ أَنَّ أَجْمَلَ احْتِفَالٍ عِشْتُهُ كَانَ فِي الرِّيَاضِ العَامَ المَاضِيَ؛ إِذْ أَخَذَنِي جَدِّي إِلَى سَاحَةٍ قَدِيمَةٍ، وَأَمْسَكَ بِيَدِي وَنَحْنُ نَرْقُصُ العَرْضَةَ مَعَ رِجَالِ الحَيِّ عَلَى إِيقَاعِ الطُّبُولِ. يَوْمَهَا لَمْ أَشْعُرْ بِأَنَّنِي ضَيْفٌ، بَلْ بِأَنَّنِي أَعُودُ إِلَى مَكَانٍ يَعْرِفُنِي، وَيَنْتَظِرُ عَوْدَتِي كُلَّ عَامٍ.</a:t>
@@ -9413,6 +9485,7 @@
                   <a:srgbClr val="1F2A37"/>
                 </a:solidFill>
                 <a:latin typeface="Amiri" pitchFamily="2" charset="-78"/>
+                <a:ea typeface="Amiri" pitchFamily="2" charset="-78"/>
                 <a:cs typeface="Amiri" pitchFamily="2" charset="-78"/>
               </a:rPr>
               <a:t>وَحِينَ أُقَارِنُهُ بِلَيْلَةِ الأَلْعَابِ النَّارِيَّةِ البَرِيطَانِيَّةِ، أَجِدُهُ أَكْثَرَ صَخَبًا وَبَهْجَةً، بَيْنَمَا تِلْكَ أَقْدَمُ تَارِيخًا وَأَهْدَأُ وَأَكْثَرُ بُرُودَةً. وَلَوْ سُئِلْتُ أَيَّهُمَا أُفَضِّلُ، لَقُلْتُ إِنَّنِي مَحْظُوظٌ لِأَنَّنِي لَا أَحْتَاجُ إِلَى الاخْتِيَارِ بَيْنَهُمَا.</a:t>
@@ -9511,11 +9584,12 @@
               <a:buNone/>
             </a:pPr>
             <a:r>
-              <a:rPr lang="en-US" sz="950" b="1" dirty="0">
+              <a:rPr lang="ar-SA" sz="950" b="1" dirty="0">
                 <a:solidFill>
                   <a:srgbClr val="FFFFFF"/>
                 </a:solidFill>
                 <a:latin typeface="Calibri" pitchFamily="34" charset="0"/>
+                <a:ea typeface="Amiri" pitchFamily="2" charset="-78"/>
                 <a:cs typeface="Amiri" pitchFamily="2" charset="-78"/>
               </a:rPr>
               <a:t>يَتَحَوَّلُ … إِلَى</a:t>
@@ -9576,11 +9650,12 @@
               <a:buNone/>
             </a:pPr>
             <a:r>
-              <a:rPr lang="en-US" sz="950" b="1" dirty="0">
+              <a:rPr lang="ar-SA" sz="950" b="1" dirty="0">
                 <a:solidFill>
                   <a:srgbClr val="FFFFFF"/>
                 </a:solidFill>
                 <a:latin typeface="Calibri" pitchFamily="34" charset="0"/>
+                <a:ea typeface="Amiri" pitchFamily="2" charset="-78"/>
                 <a:cs typeface="Amiri" pitchFamily="2" charset="-78"/>
               </a:rPr>
               <a:t>إِحْيَاءً لِذِكْرَى</a:t>
@@ -9641,11 +9716,12 @@
               <a:buNone/>
             </a:pPr>
             <a:r>
-              <a:rPr lang="en-US" sz="950" b="1" dirty="0">
+              <a:rPr lang="ar-SA" sz="950" b="1" dirty="0">
                 <a:solidFill>
                   <a:srgbClr val="FFFFFF"/>
                 </a:solidFill>
                 <a:latin typeface="Calibri" pitchFamily="34" charset="0"/>
+                <a:ea typeface="Amiri" pitchFamily="2" charset="-78"/>
                 <a:cs typeface="Amiri" pitchFamily="2" charset="-78"/>
               </a:rPr>
               <a:t>لَمْ أَشْعُرْ … بَلْ</a:t>
@@ -9706,11 +9782,12 @@
               <a:buNone/>
             </a:pPr>
             <a:r>
-              <a:rPr lang="en-US" sz="950" b="1" dirty="0">
+              <a:rPr lang="ar-SA" sz="950" b="1" dirty="0">
                 <a:solidFill>
                   <a:srgbClr val="FFFFFF"/>
                 </a:solidFill>
                 <a:latin typeface="Calibri" pitchFamily="34" charset="0"/>
+                <a:ea typeface="Amiri" pitchFamily="2" charset="-78"/>
                 <a:cs typeface="Amiri" pitchFamily="2" charset="-78"/>
               </a:rPr>
               <a:t>لَوْ سُئِلْتُ … لَقُلْتُ</a:t>
@@ -9844,6 +9921,7 @@
                   <a:srgbClr val="D4AF37"/>
                 </a:solidFill>
                 <a:latin typeface="Amiri" pitchFamily="2" charset="-78"/>
+                <a:ea typeface="Amiri" pitchFamily="2" charset="-78"/>
                 <a:cs typeface="Amiri" pitchFamily="2" charset="-78"/>
               </a:rPr>
               <a:t>م</a:t>
@@ -10101,6 +10179,7 @@
                   <a:srgbClr val="8A6D1E"/>
                 </a:solidFill>
                 <a:latin typeface="Amiri" pitchFamily="2" charset="-78"/>
+                <a:ea typeface="Amiri" pitchFamily="2" charset="-78"/>
                 <a:cs typeface="Amiri" pitchFamily="2" charset="-78"/>
               </a:rPr>
               <a:t>ب</a:t>
@@ -10165,6 +10244,7 @@
                   <a:srgbClr val="1B3B6F"/>
                 </a:solidFill>
                 <a:latin typeface="Amiri" pitchFamily="2" charset="-78"/>
+                <a:ea typeface="Amiri" pitchFamily="2" charset="-78"/>
                 <a:cs typeface="Amiri" pitchFamily="2" charset="-78"/>
               </a:rPr>
               <a:t>ب</a:t>
@@ -10216,6 +10296,7 @@
                   <a:srgbClr val="8A6D1E"/>
                 </a:solidFill>
                 <a:latin typeface="Amiri" pitchFamily="2" charset="-78"/>
+                <a:ea typeface="Amiri" pitchFamily="2" charset="-78"/>
                 <a:cs typeface="Amiri" pitchFamily="2" charset="-78"/>
               </a:rPr>
               <a:t>نَمُوذَجُ الإِجَابَةِ</a:t>
@@ -10329,6 +10410,7 @@
                   <a:srgbClr val="1F2A37"/>
                 </a:solidFill>
                 <a:latin typeface="Amiri" pitchFamily="2" charset="-78"/>
+                <a:ea typeface="Amiri" pitchFamily="2" charset="-78"/>
                 <a:cs typeface="Amiri" pitchFamily="2" charset="-78"/>
               </a:rPr>
               <a:t>تُنْفِقُ بَعْضُ الدُّوَلِ مَلَايِينَ الجُنَيْهَاتِ عَلَى احْتِفَالَاتِهَا الوَطَنِيَّةِ: أَلْعَابٌ نَارِيَّةٌ لِدَقَائِقَ مَعْدُودَةٍ، وَاسْتِعْرَاضَاتٌ ضَخْمَةٌ، وَحَفَلَاتٌ تُبَثُّ عَلَى الهَوَاءِ لِمَلَايِينِ المُشَاهِدِينَ. فَهَلْ تَسْتَحِقُّ هٰذِهِ الاحْتِفَالَاتُ كُلَّ هٰذِهِ الأَمْوَالِ؟</a:t>
@@ -10348,6 +10430,7 @@
                   <a:srgbClr val="1F2A37"/>
                 </a:solidFill>
                 <a:latin typeface="Amiri" pitchFamily="2" charset="-78"/>
+                <a:ea typeface="Amiri" pitchFamily="2" charset="-78"/>
                 <a:cs typeface="Amiri" pitchFamily="2" charset="-78"/>
               </a:rPr>
               <a:t>مِنْ نَاحِيَةٍ، تُقَوِّي هٰذِهِ المُنَاسَبَاتُ الشُّعُورَ بِالانْتِمَاءِ، وَتَجْمَعُ النَّاسَ مِنْ كُلِّ الأَعْمَارِ وَالخَلْفِيَّاتِ، كَمَا أَنَّهَا تَجْذِبُ السُّيَّاحَ، مِمَّا يُنْعِشُ الاقْتِصَادَ وَيُوَفِّرُ فُرَصَ عَمَلٍ مُؤَقَّتَةً لِلشَّبَابِ. وَمِنْ نَاحِيَةٍ أُخْرَى، يَرَى كَثِيرُونَ أَنَّ هٰذِهِ الأَمْوَالَ يُمْكِنُ أَنْ تُنْفَقَ عَلَى المُسْتَشْفَيَاتِ وَالمَدَارِسِ، بَدَلًا مِنْ أَنْ تَحْتَرِقَ فِي السَّمَاءِ خِلَالَ دَقَائِقَ وَتُلَوِّثَ الهَوَاءَ.</a:t>
@@ -10367,6 +10450,7 @@
                   <a:srgbClr val="1F2A37"/>
                 </a:solidFill>
                 <a:latin typeface="Amiri" pitchFamily="2" charset="-78"/>
+                <a:ea typeface="Amiri" pitchFamily="2" charset="-78"/>
                 <a:cs typeface="Amiri" pitchFamily="2" charset="-78"/>
               </a:rPr>
               <a:t>وَقَدْ رَأَيْتُ حَلًّا ذَكِيًّا فِي مَدِينَتِي؛ فَفِي العَامِ المَاضِي، أُلْغِيَتِ الأَلْعَابُ النَّارِيَّةُ، وَاسْتُبْدِلَ بِهَا عَرْضٌ لِلْأَضْوَاءِ أَقَلُّ تَكْلِفَةً، وَتُبُرِّعَ بِالفَرْقِ لِبَنْكِ الطَّعَامِ. وَمَعَ ذٰلِكَ، كَانَ الحُضُورُ أَكْبَرَ مِنَ السَّنَوَاتِ السَّابِقَةِ، وَكَانَتِ العَائِلَاتُ أَكْثَرَ سَعَادَةً.</a:t>
@@ -10386,6 +10470,7 @@
                   <a:srgbClr val="1F2A37"/>
                 </a:solidFill>
                 <a:latin typeface="Amiri" pitchFamily="2" charset="-78"/>
+                <a:ea typeface="Amiri" pitchFamily="2" charset="-78"/>
                 <a:cs typeface="Amiri" pitchFamily="2" charset="-78"/>
               </a:rPr>
               <a:t>لِذٰلِكَ أَرَى أَنَّ الاحْتِفَالَ ضَرُورِيٌّ، غَيْرَ أَنَّ قِيمَتَهُ لَا تُقَاسُ بِتَكْلِفَتِهِ. فَإِذَا أَنْفَقَتِ الحُكُومَاتُ بِحِكْمَةٍ وَشَفَافِيَةٍ، فَسَيَفْرَحُ النَّاسُ وَيَسْتَفِيدُ المُجْتَمَعُ مَعًا، وَيَبْقَى العِيدُ عِيدًا لِلْجَمِيعِ.</a:t>
@@ -10484,11 +10569,12 @@
               <a:buNone/>
             </a:pPr>
             <a:r>
-              <a:rPr lang="en-US" sz="950" b="1" dirty="0">
+              <a:rPr lang="ar-SA" sz="950" b="1" dirty="0">
                 <a:solidFill>
                   <a:srgbClr val="FFFFFF"/>
                 </a:solidFill>
                 <a:latin typeface="Calibri" pitchFamily="34" charset="0"/>
+                <a:ea typeface="Amiri" pitchFamily="2" charset="-78"/>
                 <a:cs typeface="Amiri" pitchFamily="2" charset="-78"/>
               </a:rPr>
               <a:t>تُبَثُّ عَلَى الهَوَاءِ</a:t>
@@ -10549,11 +10635,12 @@
               <a:buNone/>
             </a:pPr>
             <a:r>
-              <a:rPr lang="en-US" sz="950" b="1" dirty="0">
+              <a:rPr lang="ar-SA" sz="950" b="1" dirty="0">
                 <a:solidFill>
                   <a:srgbClr val="FFFFFF"/>
                 </a:solidFill>
                 <a:latin typeface="Calibri" pitchFamily="34" charset="0"/>
+                <a:ea typeface="Amiri" pitchFamily="2" charset="-78"/>
                 <a:cs typeface="Amiri" pitchFamily="2" charset="-78"/>
               </a:rPr>
               <a:t>مِمَّا يُنْعِشُ</a:t>
@@ -10614,11 +10701,12 @@
               <a:buNone/>
             </a:pPr>
             <a:r>
-              <a:rPr lang="en-US" sz="950" b="1" dirty="0">
+              <a:rPr lang="ar-SA" sz="950" b="1" dirty="0">
                 <a:solidFill>
                   <a:srgbClr val="FFFFFF"/>
                 </a:solidFill>
                 <a:latin typeface="Calibri" pitchFamily="34" charset="0"/>
+                <a:ea typeface="Amiri" pitchFamily="2" charset="-78"/>
                 <a:cs typeface="Amiri" pitchFamily="2" charset="-78"/>
               </a:rPr>
               <a:t>اسْتُبْدِلَ بِهَا</a:t>
@@ -10679,11 +10767,12 @@
               <a:buNone/>
             </a:pPr>
             <a:r>
-              <a:rPr lang="en-US" sz="950" b="1" dirty="0">
+              <a:rPr lang="ar-SA" sz="950" b="1" dirty="0">
                 <a:solidFill>
                   <a:srgbClr val="FFFFFF"/>
                 </a:solidFill>
                 <a:latin typeface="Calibri" pitchFamily="34" charset="0"/>
+                <a:ea typeface="Amiri" pitchFamily="2" charset="-78"/>
                 <a:cs typeface="Amiri" pitchFamily="2" charset="-78"/>
               </a:rPr>
               <a:t>لَا تُقَاسُ بِتَكْلِفَتِهِ</a:t>
@@ -10817,6 +10906,7 @@
                   <a:srgbClr val="D4AF37"/>
                 </a:solidFill>
                 <a:latin typeface="Amiri" pitchFamily="2" charset="-78"/>
+                <a:ea typeface="Amiri" pitchFamily="2" charset="-78"/>
                 <a:cs typeface="Amiri" pitchFamily="2" charset="-78"/>
               </a:rPr>
               <a:t>م</a:t>
@@ -11137,6 +11227,7 @@
                   <a:srgbClr val="8A6D1E"/>
                 </a:solidFill>
                 <a:latin typeface="Amiri" pitchFamily="2" charset="-78"/>
+                <a:ea typeface="Amiri" pitchFamily="2" charset="-78"/>
                 <a:cs typeface="Amiri" pitchFamily="2" charset="-78"/>
               </a:rPr>
               <a:t>قَيِّمْ عَمَلَكَ</a:t>
@@ -12381,6 +12472,7 @@
                   <a:srgbClr val="FFFFFF"/>
                 </a:solidFill>
                 <a:latin typeface="Amiri" pitchFamily="2" charset="-78"/>
+                <a:ea typeface="Amiri" pitchFamily="2" charset="-78"/>
                 <a:cs typeface="Amiri" pitchFamily="2" charset="-78"/>
               </a:rPr>
               <a:t>أَحْسَنْتُمْ! إِلَى اللِّقَاءِ</a:t>
@@ -12533,6 +12625,7 @@
                   <a:srgbClr val="D4AF37"/>
                 </a:solidFill>
                 <a:latin typeface="Amiri" pitchFamily="2" charset="-78"/>
+                <a:ea typeface="Amiri" pitchFamily="2" charset="-78"/>
                 <a:cs typeface="Amiri" pitchFamily="2" charset="-78"/>
               </a:rPr>
               <a:t>وَرْشَةُ التَّدْرِيبِ</a:t>
@@ -12666,6 +12759,7 @@
                   <a:srgbClr val="D4AF37"/>
                 </a:solidFill>
                 <a:latin typeface="Amiri" pitchFamily="2" charset="-78"/>
+                <a:ea typeface="Amiri" pitchFamily="2" charset="-78"/>
                 <a:cs typeface="Amiri" pitchFamily="2" charset="-78"/>
               </a:rPr>
               <a:t>م</a:t>
@@ -12986,6 +13080,7 @@
                   <a:srgbClr val="8A6D1E"/>
                 </a:solidFill>
                 <a:latin typeface="Amiri" pitchFamily="2" charset="-78"/>
+                <a:ea typeface="Amiri" pitchFamily="2" charset="-78"/>
                 <a:cs typeface="Amiri" pitchFamily="2" charset="-78"/>
               </a:rPr>
               <a:t>آدَابُ الصَّفِّ</a:t>
@@ -14517,6 +14612,7 @@
                   <a:srgbClr val="D4AF37"/>
                 </a:solidFill>
                 <a:latin typeface="Amiri" pitchFamily="2" charset="-78"/>
+                <a:ea typeface="Amiri" pitchFamily="2" charset="-78"/>
                 <a:cs typeface="Amiri" pitchFamily="2" charset="-78"/>
               </a:rPr>
               <a:t>م</a:t>
@@ -14837,6 +14933,7 @@
                   <a:srgbClr val="8A6D1E"/>
                 </a:solidFill>
                 <a:latin typeface="Amiri" pitchFamily="2" charset="-78"/>
+                <a:ea typeface="Amiri" pitchFamily="2" charset="-78"/>
                 <a:cs typeface="Amiri" pitchFamily="2" charset="-78"/>
               </a:rPr>
               <a:t>خَرِيطَةُ الوَرْشَةِ</a:t>
@@ -15151,6 +15248,7 @@
                   <a:srgbClr val="1B3B6F"/>
                 </a:solidFill>
                 <a:latin typeface="Amiri" pitchFamily="2" charset="-78"/>
+                <a:ea typeface="Amiri" pitchFamily="2" charset="-78"/>
                 <a:cs typeface="Amiri" pitchFamily="2" charset="-78"/>
               </a:rPr>
               <a:t>كَيْفَ</a:t>
@@ -15427,6 +15525,7 @@
                   <a:srgbClr val="1E6B52"/>
                 </a:solidFill>
                 <a:latin typeface="Amiri" pitchFamily="2" charset="-78"/>
+                <a:ea typeface="Amiri" pitchFamily="2" charset="-78"/>
                 <a:cs typeface="Amiri" pitchFamily="2" charset="-78"/>
               </a:rPr>
               <a:t>الاسْتِمَارَةُ</a:t>
@@ -15703,6 +15802,7 @@
                   <a:srgbClr val="1E6B52"/>
                 </a:solidFill>
                 <a:latin typeface="Amiri" pitchFamily="2" charset="-78"/>
+                <a:ea typeface="Amiri" pitchFamily="2" charset="-78"/>
                 <a:cs typeface="Amiri" pitchFamily="2" charset="-78"/>
               </a:rPr>
               <a:t>الرِّسَالَةُ</a:t>
@@ -15979,6 +16079,7 @@
                   <a:srgbClr val="1E6B52"/>
                 </a:solidFill>
                 <a:latin typeface="Amiri" pitchFamily="2" charset="-78"/>
+                <a:ea typeface="Amiri" pitchFamily="2" charset="-78"/>
                 <a:cs typeface="Amiri" pitchFamily="2" charset="-78"/>
               </a:rPr>
               <a:t>المَقَالُ</a:t>
@@ -16255,6 +16356,7 @@
                   <a:srgbClr val="8A6D1E"/>
                 </a:solidFill>
                 <a:latin typeface="Amiri" pitchFamily="2" charset="-78"/>
+                <a:ea typeface="Amiri" pitchFamily="2" charset="-78"/>
                 <a:cs typeface="Amiri" pitchFamily="2" charset="-78"/>
               </a:rPr>
               <a:t>قَيِّمْ</a:t>
@@ -16498,6 +16600,7 @@
                   <a:srgbClr val="D4AF37"/>
                 </a:solidFill>
                 <a:latin typeface="Amiri" pitchFamily="2" charset="-78"/>
+                <a:ea typeface="Amiri" pitchFamily="2" charset="-78"/>
                 <a:cs typeface="Amiri" pitchFamily="2" charset="-78"/>
               </a:rPr>
               <a:t>م</a:t>
@@ -16818,6 +16921,7 @@
                   <a:srgbClr val="8A6D1E"/>
                 </a:solidFill>
                 <a:latin typeface="Amiri" pitchFamily="2" charset="-78"/>
+                <a:ea typeface="Amiri" pitchFamily="2" charset="-78"/>
                 <a:cs typeface="Amiri" pitchFamily="2" charset="-78"/>
               </a:rPr>
               <a:t>امْتِحَانُ الكِتَابَةِ</a:t>
@@ -17442,6 +17546,7 @@
                   <a:srgbClr val="1B3B6F"/>
                 </a:solidFill>
                 <a:latin typeface="Amiri" pitchFamily="2" charset="-78"/>
+                <a:ea typeface="Amiri" pitchFamily="2" charset="-78"/>
                 <a:cs typeface="Amiri" pitchFamily="2" charset="-78"/>
               </a:rPr>
               <a:t>رُفِعَتِ الأَعْلَامُ، وَزُيِّنَتِ الشَّوَارِعُ بِالأَضْوَاءِ</a:t>
@@ -17541,6 +17646,7 @@
                   <a:srgbClr val="1B3B6F"/>
                 </a:solidFill>
                 <a:latin typeface="Amiri" pitchFamily="2" charset="-78"/>
+                <a:ea typeface="Amiri" pitchFamily="2" charset="-78"/>
                 <a:cs typeface="Amiri" pitchFamily="2" charset="-78"/>
               </a:rPr>
               <a:t>يُحْتَفَلُ بِهِ فِي الثَّانِي مِنْ دِيسَمْبِرَ</a:t>
@@ -17640,6 +17746,7 @@
                   <a:srgbClr val="1B3B6F"/>
                 </a:solidFill>
                 <a:latin typeface="Amiri" pitchFamily="2" charset="-78"/>
+                <a:ea typeface="Amiri" pitchFamily="2" charset="-78"/>
                 <a:cs typeface="Amiri" pitchFamily="2" charset="-78"/>
               </a:rPr>
               <a:t>هٰذَا الاحْتِفَالُ أَكْبَرُ مِنْ … وَأَكْثَرُ حَمَاسًا</a:t>
@@ -17811,6 +17918,7 @@
                   <a:srgbClr val="D4AF37"/>
                 </a:solidFill>
                 <a:latin typeface="Amiri" pitchFamily="2" charset="-78"/>
+                <a:ea typeface="Amiri" pitchFamily="2" charset="-78"/>
                 <a:cs typeface="Amiri" pitchFamily="2" charset="-78"/>
               </a:rPr>
               <a:t>م</a:t>
@@ -18131,6 +18239,7 @@
                   <a:srgbClr val="8A6D1E"/>
                 </a:solidFill>
                 <a:latin typeface="Amiri" pitchFamily="2" charset="-78"/>
+                <a:ea typeface="Amiri" pitchFamily="2" charset="-78"/>
                 <a:cs typeface="Amiri" pitchFamily="2" charset="-78"/>
               </a:rPr>
               <a:t>اسْتِمَارَةُ التَّطَوُّعِ فِي المِهْرَجَانِ</a:t>
@@ -18487,6 +18596,7 @@
                   <a:srgbClr val="1B3B6F"/>
                 </a:solidFill>
                 <a:latin typeface="Amiri" pitchFamily="2" charset="-78"/>
+                <a:ea typeface="Amiri" pitchFamily="2" charset="-78"/>
                 <a:cs typeface="Amiri" pitchFamily="2" charset="-78"/>
               </a:rPr>
               <a:t>الاسْمُ</a:t>
@@ -18731,6 +18841,7 @@
                   <a:srgbClr val="1B3B6F"/>
                 </a:solidFill>
                 <a:latin typeface="Amiri" pitchFamily="2" charset="-78"/>
+                <a:ea typeface="Amiri" pitchFamily="2" charset="-78"/>
                 <a:cs typeface="Amiri" pitchFamily="2" charset="-78"/>
               </a:rPr>
               <a:t>العُمْرُ</a:t>
@@ -18975,6 +19086,7 @@
                   <a:srgbClr val="1B3B6F"/>
                 </a:solidFill>
                 <a:latin typeface="Amiri" pitchFamily="2" charset="-78"/>
+                <a:ea typeface="Amiri" pitchFamily="2" charset="-78"/>
                 <a:cs typeface="Amiri" pitchFamily="2" charset="-78"/>
               </a:rPr>
               <a:t>المِهْرَجَانُ</a:t>
@@ -19219,6 +19331,7 @@
                   <a:srgbClr val="1B3B6F"/>
                 </a:solidFill>
                 <a:latin typeface="Amiri" pitchFamily="2" charset="-78"/>
+                <a:ea typeface="Amiri" pitchFamily="2" charset="-78"/>
                 <a:cs typeface="Amiri" pitchFamily="2" charset="-78"/>
               </a:rPr>
               <a:t>التَّارِيخُ</a:t>
@@ -19463,6 +19576,7 @@
                   <a:srgbClr val="1B3B6F"/>
                 </a:solidFill>
                 <a:latin typeface="Amiri" pitchFamily="2" charset="-78"/>
+                <a:ea typeface="Amiri" pitchFamily="2" charset="-78"/>
                 <a:cs typeface="Amiri" pitchFamily="2" charset="-78"/>
               </a:rPr>
               <a:t>المَهَمَّةُ المُفَضَّلَةُ</a:t>
@@ -19707,6 +19821,7 @@
                   <a:srgbClr val="1B3B6F"/>
                 </a:solidFill>
                 <a:latin typeface="Amiri" pitchFamily="2" charset="-78"/>
+                <a:ea typeface="Amiri" pitchFamily="2" charset="-78"/>
                 <a:cs typeface="Amiri" pitchFamily="2" charset="-78"/>
               </a:rPr>
               <a:t>مَهَارَةٌ تَقْلِيدِيَّةٌ</a:t>
@@ -19951,6 +20066,7 @@
                   <a:srgbClr val="1B3B6F"/>
                 </a:solidFill>
                 <a:latin typeface="Amiri" pitchFamily="2" charset="-78"/>
+                <a:ea typeface="Amiri" pitchFamily="2" charset="-78"/>
                 <a:cs typeface="Amiri" pitchFamily="2" charset="-78"/>
               </a:rPr>
               <a:t>احْتِفَالٌ حَضَرْتَهُ</a:t>
@@ -20130,6 +20246,7 @@
                   <a:srgbClr val="1B3B6F"/>
                 </a:solidFill>
                 <a:latin typeface="Amiri" pitchFamily="2" charset="-78"/>
+                <a:ea typeface="Amiri" pitchFamily="2" charset="-78"/>
                 <a:cs typeface="Amiri" pitchFamily="2" charset="-78"/>
               </a:rPr>
               <a:t>جُمْلَةٌ: مَاذَا يُعْرَضُ فِي المِهْرَجَانِ؟</a:t>
@@ -20339,6 +20456,7 @@
                   <a:srgbClr val="D4AF37"/>
                 </a:solidFill>
                 <a:latin typeface="Amiri" pitchFamily="2" charset="-78"/>
+                <a:ea typeface="Amiri" pitchFamily="2" charset="-78"/>
                 <a:cs typeface="Amiri" pitchFamily="2" charset="-78"/>
               </a:rPr>
               <a:t>م</a:t>
@@ -20659,6 +20777,7 @@
                   <a:srgbClr val="8A6D1E"/>
                 </a:solidFill>
                 <a:latin typeface="Amiri" pitchFamily="2" charset="-78"/>
+                <a:ea typeface="Amiri" pitchFamily="2" charset="-78"/>
                 <a:cs typeface="Amiri" pitchFamily="2" charset="-78"/>
               </a:rPr>
               <a:t>نَمُوذَجُ الإِجَابَةِ</a:t>
@@ -20977,6 +21096,7 @@
                   <a:srgbClr val="1B3B6F"/>
                 </a:solidFill>
                 <a:latin typeface="Amiri" pitchFamily="2" charset="-78"/>
+                <a:ea typeface="Amiri" pitchFamily="2" charset="-78"/>
                 <a:cs typeface="Amiri" pitchFamily="2" charset="-78"/>
               </a:rPr>
               <a:t>خَالِدٌ العُتَيْبِيُّ</a:t>
@@ -21015,6 +21135,7 @@
                   <a:srgbClr val="1B3B6F"/>
                 </a:solidFill>
                 <a:latin typeface="Amiri" pitchFamily="2" charset="-78"/>
+                <a:ea typeface="Amiri" pitchFamily="2" charset="-78"/>
                 <a:cs typeface="Amiri" pitchFamily="2" charset="-78"/>
               </a:rPr>
               <a:t>الاسْمُ</a:t>
@@ -21156,6 +21277,7 @@
                   <a:srgbClr val="1B3B6F"/>
                 </a:solidFill>
                 <a:latin typeface="Amiri" pitchFamily="2" charset="-78"/>
+                <a:ea typeface="Amiri" pitchFamily="2" charset="-78"/>
                 <a:cs typeface="Amiri" pitchFamily="2" charset="-78"/>
               </a:rPr>
               <a:t>خَمْسَ عَشْرَةَ سَنَةً</a:t>
@@ -21194,6 +21316,7 @@
                   <a:srgbClr val="1B3B6F"/>
                 </a:solidFill>
                 <a:latin typeface="Amiri" pitchFamily="2" charset="-78"/>
+                <a:ea typeface="Amiri" pitchFamily="2" charset="-78"/>
                 <a:cs typeface="Amiri" pitchFamily="2" charset="-78"/>
               </a:rPr>
               <a:t>العُمْرُ</a:t>
@@ -21335,6 +21458,7 @@
                   <a:srgbClr val="1B3B6F"/>
                 </a:solidFill>
                 <a:latin typeface="Amiri" pitchFamily="2" charset="-78"/>
+                <a:ea typeface="Amiri" pitchFamily="2" charset="-78"/>
                 <a:cs typeface="Amiri" pitchFamily="2" charset="-78"/>
               </a:rPr>
               <a:t>مِهْرَجَانُ التُّرَاثِ العَرَبِيِّ</a:t>
@@ -21373,6 +21497,7 @@
                   <a:srgbClr val="1B3B6F"/>
                 </a:solidFill>
                 <a:latin typeface="Amiri" pitchFamily="2" charset="-78"/>
+                <a:ea typeface="Amiri" pitchFamily="2" charset="-78"/>
                 <a:cs typeface="Amiri" pitchFamily="2" charset="-78"/>
               </a:rPr>
               <a:t>المِهْرَجَانُ</a:t>
@@ -21514,6 +21639,7 @@
                   <a:srgbClr val="1B3B6F"/>
                 </a:solidFill>
                 <a:latin typeface="Amiri" pitchFamily="2" charset="-78"/>
+                <a:ea typeface="Amiri" pitchFamily="2" charset="-78"/>
                 <a:cs typeface="Amiri" pitchFamily="2" charset="-78"/>
               </a:rPr>
               <a:t>الثَّالِثُ وَالعِشْرُونَ مِنْ سِبْتَمْبِرَ</a:t>
@@ -21552,6 +21678,7 @@
                   <a:srgbClr val="1B3B6F"/>
                 </a:solidFill>
                 <a:latin typeface="Amiri" pitchFamily="2" charset="-78"/>
+                <a:ea typeface="Amiri" pitchFamily="2" charset="-78"/>
                 <a:cs typeface="Amiri" pitchFamily="2" charset="-78"/>
               </a:rPr>
               <a:t>التَّارِيخُ</a:t>
@@ -21693,6 +21820,7 @@
                   <a:srgbClr val="1B3B6F"/>
                 </a:solidFill>
                 <a:latin typeface="Amiri" pitchFamily="2" charset="-78"/>
+                <a:ea typeface="Amiri" pitchFamily="2" charset="-78"/>
                 <a:cs typeface="Amiri" pitchFamily="2" charset="-78"/>
               </a:rPr>
               <a:t>تَزْيِينُ المَكَانِ</a:t>
@@ -21731,6 +21859,7 @@
                   <a:srgbClr val="1B3B6F"/>
                 </a:solidFill>
                 <a:latin typeface="Amiri" pitchFamily="2" charset="-78"/>
+                <a:ea typeface="Amiri" pitchFamily="2" charset="-78"/>
                 <a:cs typeface="Amiri" pitchFamily="2" charset="-78"/>
               </a:rPr>
               <a:t>المَهَمَّةُ المُفَضَّلَةُ</a:t>
@@ -21872,6 +22001,7 @@
                   <a:srgbClr val="1B3B6F"/>
                 </a:solidFill>
                 <a:latin typeface="Amiri" pitchFamily="2" charset="-78"/>
+                <a:ea typeface="Amiri" pitchFamily="2" charset="-78"/>
                 <a:cs typeface="Amiri" pitchFamily="2" charset="-78"/>
               </a:rPr>
               <a:t>رَقْصَةُ العَرْضَةِ</a:t>
@@ -21910,6 +22040,7 @@
                   <a:srgbClr val="1B3B6F"/>
                 </a:solidFill>
                 <a:latin typeface="Amiri" pitchFamily="2" charset="-78"/>
+                <a:ea typeface="Amiri" pitchFamily="2" charset="-78"/>
                 <a:cs typeface="Amiri" pitchFamily="2" charset="-78"/>
               </a:rPr>
               <a:t>مَهَارَةٌ تَقْلِيدِيَّةٌ</a:t>
@@ -22051,6 +22182,7 @@
                   <a:srgbClr val="1B3B6F"/>
                 </a:solidFill>
                 <a:latin typeface="Amiri" pitchFamily="2" charset="-78"/>
+                <a:ea typeface="Amiri" pitchFamily="2" charset="-78"/>
                 <a:cs typeface="Amiri" pitchFamily="2" charset="-78"/>
               </a:rPr>
               <a:t>اليَوْمُ الوَطَنِيُّ فِي الرِّيَاضِ</a:t>
@@ -22089,6 +22221,7 @@
                   <a:srgbClr val="1B3B6F"/>
                 </a:solidFill>
                 <a:latin typeface="Amiri" pitchFamily="2" charset="-78"/>
+                <a:ea typeface="Amiri" pitchFamily="2" charset="-78"/>
                 <a:cs typeface="Amiri" pitchFamily="2" charset="-78"/>
               </a:rPr>
               <a:t>احْتِفَالٌ حَضَرْتَهُ</a:t>
@@ -22230,6 +22363,7 @@
                   <a:srgbClr val="1B3B6F"/>
                 </a:solidFill>
                 <a:latin typeface="Amiri" pitchFamily="2" charset="-78"/>
+                <a:ea typeface="Amiri" pitchFamily="2" charset="-78"/>
                 <a:cs typeface="Amiri" pitchFamily="2" charset="-78"/>
               </a:rPr>
               <a:t>تُعْرَضُ الأَزْيَاءُ التَّقْلِيدِيَّةُ، وَتُقَدَّمُ القَهْوَةُ العَرَبِيَّةُ لِلزُّوَّارِ.</a:t>
@@ -22268,6 +22402,7 @@
                   <a:srgbClr val="1B3B6F"/>
                 </a:solidFill>
                 <a:latin typeface="Amiri" pitchFamily="2" charset="-78"/>
+                <a:ea typeface="Amiri" pitchFamily="2" charset="-78"/>
                 <a:cs typeface="Amiri" pitchFamily="2" charset="-78"/>
               </a:rPr>
               <a:t>جُمْلَةٌ: مَاذَا يُعْرَضُ فِي المِهْرَجَانِ؟</a:t>
@@ -22477,6 +22612,7 @@
                   <a:srgbClr val="D4AF37"/>
                 </a:solidFill>
                 <a:latin typeface="Amiri" pitchFamily="2" charset="-78"/>
+                <a:ea typeface="Amiri" pitchFamily="2" charset="-78"/>
                 <a:cs typeface="Amiri" pitchFamily="2" charset="-78"/>
               </a:rPr>
               <a:t>م</a:t>
@@ -22797,6 +22933,7 @@
                   <a:srgbClr val="8A6D1E"/>
                 </a:solidFill>
                 <a:latin typeface="Amiri" pitchFamily="2" charset="-78"/>
+                <a:ea typeface="Amiri" pitchFamily="2" charset="-78"/>
                 <a:cs typeface="Amiri" pitchFamily="2" charset="-78"/>
               </a:rPr>
               <a:t>يَوْمٌ وَطَنِيٌّ حَضَرْتُهُ</a:t>
@@ -23272,6 +23409,7 @@
                   <a:srgbClr val="1B3B6F"/>
                 </a:solidFill>
                 <a:latin typeface="Amiri" pitchFamily="2" charset="-78"/>
+                <a:ea typeface="Amiri" pitchFamily="2" charset="-78"/>
                 <a:cs typeface="Amiri" pitchFamily="2" charset="-78"/>
               </a:rPr>
               <a:t>حَضَرْتُ أَمْسِ اليَوْمَ الوَطَنِيَّ لِلْإِمَارَاتِ</a:t>
@@ -23348,6 +23486,7 @@
                   <a:srgbClr val="1B3B6F"/>
                 </a:solidFill>
                 <a:latin typeface="Amiri" pitchFamily="2" charset="-78"/>
+                <a:ea typeface="Amiri" pitchFamily="2" charset="-78"/>
                 <a:cs typeface="Amiri" pitchFamily="2" charset="-78"/>
               </a:rPr>
               <a:t>رُفِعَتِ الأَعْلَامُ، وَزُيِّنَتِ الشَّوَارِعُ</a:t>
@@ -23424,6 +23563,7 @@
                   <a:srgbClr val="1B3B6F"/>
                 </a:solidFill>
                 <a:latin typeface="Amiri" pitchFamily="2" charset="-78"/>
+                <a:ea typeface="Amiri" pitchFamily="2" charset="-78"/>
                 <a:cs typeface="Amiri" pitchFamily="2" charset="-78"/>
               </a:rPr>
               <a:t>هٰذَا الاحْتِفَالُ أَكْبَرُ مِنْ …</a:t>
@@ -23500,6 +23640,7 @@
                   <a:srgbClr val="1B3B6F"/>
                 </a:solidFill>
                 <a:latin typeface="Amiri" pitchFamily="2" charset="-78"/>
+                <a:ea typeface="Amiri" pitchFamily="2" charset="-78"/>
                 <a:cs typeface="Amiri" pitchFamily="2" charset="-78"/>
               </a:rPr>
               <a:t>فِي السَّنَةِ القَادِمَةِ سَأَحْضُرُهُ …</a:t>
@@ -23671,6 +23812,7 @@
                   <a:srgbClr val="D4AF37"/>
                 </a:solidFill>
                 <a:latin typeface="Amiri" pitchFamily="2" charset="-78"/>
+                <a:ea typeface="Amiri" pitchFamily="2" charset="-78"/>
                 <a:cs typeface="Amiri" pitchFamily="2" charset="-78"/>
               </a:rPr>
               <a:t>م</a:t>
@@ -23991,6 +24133,7 @@
                   <a:srgbClr val="8A6D1E"/>
                 </a:solidFill>
                 <a:latin typeface="Amiri" pitchFamily="2" charset="-78"/>
+                <a:ea typeface="Amiri" pitchFamily="2" charset="-78"/>
                 <a:cs typeface="Amiri" pitchFamily="2" charset="-78"/>
               </a:rPr>
               <a:t>نَصُّ السُّؤَالِ</a:t>
@@ -24271,6 +24414,7 @@
                   <a:srgbClr val="1B3B6F"/>
                 </a:solidFill>
                 <a:latin typeface="Amiri" pitchFamily="2" charset="-78"/>
+                <a:ea typeface="Amiri" pitchFamily="2" charset="-78"/>
                 <a:cs typeface="Amiri" pitchFamily="2" charset="-78"/>
               </a:rPr>
               <a:t>اكْتُبْ رِسَالَةً إِلَى صَدِيقِكَ عَنْ يَوْمٍ وَطَنِيٍّ حَضَرْتَهُ (٨٠–٩٠ كَلِمَةً).</a:t>
@@ -24412,6 +24556,7 @@
                   <a:srgbClr val="1B3B6F"/>
                 </a:solidFill>
                 <a:latin typeface="Amiri" pitchFamily="2" charset="-78"/>
+                <a:ea typeface="Amiri" pitchFamily="2" charset="-78"/>
                 <a:cs typeface="Amiri" pitchFamily="2" charset="-78"/>
               </a:rPr>
               <a:t>أَيْنَ أَنْتَ؟ وَمَا اليَوْمُ الوَطَنِيُّ؟ وَمَتَى يُحْتَفَلُ بِهِ؟</a:t>
@@ -24553,6 +24698,7 @@
                   <a:srgbClr val="1B3B6F"/>
                 </a:solidFill>
                 <a:latin typeface="Amiri" pitchFamily="2" charset="-78"/>
+                <a:ea typeface="Amiri" pitchFamily="2" charset="-78"/>
                 <a:cs typeface="Amiri" pitchFamily="2" charset="-78"/>
               </a:rPr>
               <a:t>مَاذَا حَدَثَ فِي ذٰلِكَ اليَوْمِ؟</a:t>
@@ -24694,6 +24840,7 @@
                   <a:srgbClr val="1B3B6F"/>
                 </a:solidFill>
                 <a:latin typeface="Amiri" pitchFamily="2" charset="-78"/>
+                <a:ea typeface="Amiri" pitchFamily="2" charset="-78"/>
                 <a:cs typeface="Amiri" pitchFamily="2" charset="-78"/>
               </a:rPr>
               <a:t>قَارِنْ بَيْنَهُ وَبَيْنَ احْتِفَالٍ فِي بَلَدِكَ.</a:t>
@@ -24835,6 +24982,7 @@
                   <a:srgbClr val="1B3B6F"/>
                 </a:solidFill>
                 <a:latin typeface="Amiri" pitchFamily="2" charset="-78"/>
+                <a:ea typeface="Amiri" pitchFamily="2" charset="-78"/>
                 <a:cs typeface="Amiri" pitchFamily="2" charset="-78"/>
               </a:rPr>
               <a:t>مَا رَأْيُكَ؟ وَمَا خِطَطُكَ؟ وَاسْأَلْ صَدِيقَكَ سُؤَالًا.</a:t>
@@ -25044,6 +25192,7 @@
                   <a:srgbClr val="D4AF37"/>
                 </a:solidFill>
                 <a:latin typeface="Amiri" pitchFamily="2" charset="-78"/>
+                <a:ea typeface="Amiri" pitchFamily="2" charset="-78"/>
                 <a:cs typeface="Amiri" pitchFamily="2" charset="-78"/>
               </a:rPr>
               <a:t>م</a:t>
@@ -25364,6 +25513,7 @@
                   <a:srgbClr val="8A6D1E"/>
                 </a:solidFill>
                 <a:latin typeface="Amiri" pitchFamily="2" charset="-78"/>
+                <a:ea typeface="Amiri" pitchFamily="2" charset="-78"/>
                 <a:cs typeface="Amiri" pitchFamily="2" charset="-78"/>
               </a:rPr>
               <a:t>قَوَالِبُ الكِتَابَةِ</a:t>
@@ -25644,6 +25794,7 @@
                   <a:srgbClr val="1B3B6F"/>
                 </a:solidFill>
                 <a:latin typeface="Amiri" pitchFamily="2" charset="-78"/>
+                <a:ea typeface="Amiri" pitchFamily="2" charset="-78"/>
                 <a:cs typeface="Amiri" pitchFamily="2" charset="-78"/>
               </a:rPr>
               <a:t>مَرْحَبًا يَا ______ ، أَنَا الآنَ فِي ______ .</a:t>
@@ -25850,6 +26001,7 @@
                   <a:srgbClr val="1B3B6F"/>
                 </a:solidFill>
                 <a:latin typeface="Amiri" pitchFamily="2" charset="-78"/>
+                <a:ea typeface="Amiri" pitchFamily="2" charset="-78"/>
                 <a:cs typeface="Amiri" pitchFamily="2" charset="-78"/>
               </a:rPr>
               <a:t>حَضَرْتُ اليَوْمَ الوَطَنِيَّ فِي ______ ؛ يُحْتَفَلُ بِهِ فِي ______ .</a:t>
@@ -26056,6 +26208,7 @@
                   <a:srgbClr val="1B3B6F"/>
                 </a:solidFill>
                 <a:latin typeface="Amiri" pitchFamily="2" charset="-78"/>
+                <a:ea typeface="Amiri" pitchFamily="2" charset="-78"/>
                 <a:cs typeface="Amiri" pitchFamily="2" charset="-78"/>
               </a:rPr>
               <a:t>رُفِعَتِ ______ ، وَأُطْلِقَتْ ______ .</a:t>
@@ -26262,6 +26415,7 @@
                   <a:srgbClr val="1B3B6F"/>
                 </a:solidFill>
                 <a:latin typeface="Amiri" pitchFamily="2" charset="-78"/>
+                <a:ea typeface="Amiri" pitchFamily="2" charset="-78"/>
                 <a:cs typeface="Amiri" pitchFamily="2" charset="-78"/>
               </a:rPr>
               <a:t>هٰذَا الاحْتِفَالُ أَكْبَرُ مِنْ ______ .</a:t>
@@ -26468,6 +26622,7 @@
                   <a:srgbClr val="1B3B6F"/>
                 </a:solidFill>
                 <a:latin typeface="Amiri" pitchFamily="2" charset="-78"/>
+                <a:ea typeface="Amiri" pitchFamily="2" charset="-78"/>
                 <a:cs typeface="Amiri" pitchFamily="2" charset="-78"/>
               </a:rPr>
               <a:t>أَعْجَبَنِي لِأَنَّ ______ . سَأَ______ .</a:t>
@@ -26674,6 +26829,7 @@
                   <a:srgbClr val="1B3B6F"/>
                 </a:solidFill>
                 <a:latin typeface="Amiri" pitchFamily="2" charset="-78"/>
+                <a:ea typeface="Amiri" pitchFamily="2" charset="-78"/>
                 <a:cs typeface="Amiri" pitchFamily="2" charset="-78"/>
               </a:rPr>
               <a:t>وَأَنْتَ، ______ ؟ إِلَى اللِّقَاءِ.</a:t>
@@ -26913,13 +27069,9 @@
     <a:fontScheme name="Office">
       <a:majorFont>
         <a:latin typeface="Calibri Light" panose="020F0302020204030204"/>
-        <a:ea typeface=""/>
-        <a:cs typeface=""/>
-        <a:font script="Jpan" typeface="游ゴシック Light"/>
-        <a:font script="Hang" typeface="맑은 고딕"/>
-        <a:font script="Hans" typeface="等线 Light"/>
-        <a:font script="Hant" typeface="新細明體"/>
-        <a:font script="Arab" typeface="Times New Roman"/>
+        <a:ea typeface="Amiri" pitchFamily="2" charset="-78"/>
+        <a:cs typeface="Amiri" pitchFamily="2" charset="-78"/>
+        <a:font script="Arab" typeface="Amiri"/>
         <a:font script="Hebr" typeface="Times New Roman"/>
         <a:font script="Thai" typeface="Angsana New"/>
         <a:font script="Ethi" typeface="Nyala"/>
@@ -26965,13 +27117,9 @@
       </a:majorFont>
       <a:minorFont>
         <a:latin typeface="Calibri" panose="020F0502020204030204"/>
-        <a:ea typeface=""/>
-        <a:cs typeface=""/>
-        <a:font script="Jpan" typeface="游ゴシック"/>
-        <a:font script="Hang" typeface="맑은 고딕"/>
-        <a:font script="Hans" typeface="等线"/>
-        <a:font script="Hant" typeface="新細明體"/>
-        <a:font script="Arab" typeface="Arial"/>
+        <a:ea typeface="Amiri" pitchFamily="2" charset="-78"/>
+        <a:cs typeface="Amiri" pitchFamily="2" charset="-78"/>
+        <a:font script="Arab" typeface="Amiri"/>
         <a:font script="Hebr" typeface="Arial"/>
         <a:font script="Thai" typeface="Cordia New"/>
         <a:font script="Ethi" typeface="Nyala"/>

--- a/Topic_E/Exam_Practice/TE-L07_Writing_Workshop_National_Festivals_and_Traditions.pptx
+++ b/Topic_E/Exam_Practice/TE-L07_Writing_Workshop_National_Festivals_and_Traditions.pptx
@@ -3852,7 +3852,7 @@
                 <a:solidFill>
                   <a:srgbClr val="FFFFFF"/>
                 </a:solidFill>
-                <a:latin typeface="Calibri" pitchFamily="34" charset="0"/>
+                <a:latin typeface="Amiri" pitchFamily="2" charset="-78"/>
                 <a:ea typeface="Amiri" pitchFamily="2" charset="-78"/>
                 <a:cs typeface="Amiri" pitchFamily="2" charset="-78"/>
               </a:rPr>
@@ -3918,7 +3918,7 @@
                 <a:solidFill>
                   <a:srgbClr val="FFFFFF"/>
                 </a:solidFill>
-                <a:latin typeface="Calibri" pitchFamily="34" charset="0"/>
+                <a:latin typeface="Amiri" pitchFamily="2" charset="-78"/>
                 <a:ea typeface="Amiri" pitchFamily="2" charset="-78"/>
                 <a:cs typeface="Amiri" pitchFamily="2" charset="-78"/>
               </a:rPr>
@@ -3984,7 +3984,7 @@
                 <a:solidFill>
                   <a:srgbClr val="FFFFFF"/>
                 </a:solidFill>
-                <a:latin typeface="Calibri" pitchFamily="34" charset="0"/>
+                <a:latin typeface="Amiri" pitchFamily="2" charset="-78"/>
                 <a:ea typeface="Amiri" pitchFamily="2" charset="-78"/>
                 <a:cs typeface="Amiri" pitchFamily="2" charset="-78"/>
               </a:rPr>
@@ -4050,7 +4050,7 @@
                 <a:solidFill>
                   <a:srgbClr val="FFFFFF"/>
                 </a:solidFill>
-                <a:latin typeface="Calibri" pitchFamily="34" charset="0"/>
+                <a:latin typeface="Amiri" pitchFamily="2" charset="-78"/>
                 <a:ea typeface="Amiri" pitchFamily="2" charset="-78"/>
                 <a:cs typeface="Amiri" pitchFamily="2" charset="-78"/>
               </a:rPr>
@@ -4848,7 +4848,7 @@
                 <a:solidFill>
                   <a:srgbClr val="FFFFFF"/>
                 </a:solidFill>
-                <a:latin typeface="Calibri" pitchFamily="34" charset="0"/>
+                <a:latin typeface="Amiri" pitchFamily="2" charset="-78"/>
                 <a:ea typeface="Amiri" pitchFamily="2" charset="-78"/>
                 <a:cs typeface="Amiri" pitchFamily="2" charset="-78"/>
               </a:rPr>
@@ -4914,7 +4914,7 @@
                 <a:solidFill>
                   <a:srgbClr val="FFFFFF"/>
                 </a:solidFill>
-                <a:latin typeface="Calibri" pitchFamily="34" charset="0"/>
+                <a:latin typeface="Amiri" pitchFamily="2" charset="-78"/>
                 <a:ea typeface="Amiri" pitchFamily="2" charset="-78"/>
                 <a:cs typeface="Amiri" pitchFamily="2" charset="-78"/>
               </a:rPr>
@@ -4980,7 +4980,7 @@
                 <a:solidFill>
                   <a:srgbClr val="FFFFFF"/>
                 </a:solidFill>
-                <a:latin typeface="Calibri" pitchFamily="34" charset="0"/>
+                <a:latin typeface="Amiri" pitchFamily="2" charset="-78"/>
                 <a:ea typeface="Amiri" pitchFamily="2" charset="-78"/>
                 <a:cs typeface="Amiri" pitchFamily="2" charset="-78"/>
               </a:rPr>
@@ -5046,7 +5046,7 @@
                 <a:solidFill>
                   <a:srgbClr val="FFFFFF"/>
                 </a:solidFill>
-                <a:latin typeface="Calibri" pitchFamily="34" charset="0"/>
+                <a:latin typeface="Amiri" pitchFamily="2" charset="-78"/>
                 <a:ea typeface="Amiri" pitchFamily="2" charset="-78"/>
                 <a:cs typeface="Amiri" pitchFamily="2" charset="-78"/>
               </a:rPr>
@@ -8603,7 +8603,7 @@
                 <a:solidFill>
                   <a:srgbClr val="FFFFFF"/>
                 </a:solidFill>
-                <a:latin typeface="Calibri" pitchFamily="34" charset="0"/>
+                <a:latin typeface="Amiri" pitchFamily="2" charset="-78"/>
                 <a:ea typeface="Amiri" pitchFamily="2" charset="-78"/>
                 <a:cs typeface="Amiri" pitchFamily="2" charset="-78"/>
               </a:rPr>
@@ -8669,7 +8669,7 @@
                 <a:solidFill>
                   <a:srgbClr val="FFFFFF"/>
                 </a:solidFill>
-                <a:latin typeface="Calibri" pitchFamily="34" charset="0"/>
+                <a:latin typeface="Amiri" pitchFamily="2" charset="-78"/>
                 <a:ea typeface="Amiri" pitchFamily="2" charset="-78"/>
                 <a:cs typeface="Amiri" pitchFamily="2" charset="-78"/>
               </a:rPr>
@@ -8735,7 +8735,7 @@
                 <a:solidFill>
                   <a:srgbClr val="FFFFFF"/>
                 </a:solidFill>
-                <a:latin typeface="Calibri" pitchFamily="34" charset="0"/>
+                <a:latin typeface="Amiri" pitchFamily="2" charset="-78"/>
                 <a:ea typeface="Amiri" pitchFamily="2" charset="-78"/>
                 <a:cs typeface="Amiri" pitchFamily="2" charset="-78"/>
               </a:rPr>
@@ -8801,7 +8801,7 @@
                 <a:solidFill>
                   <a:srgbClr val="FFFFFF"/>
                 </a:solidFill>
-                <a:latin typeface="Calibri" pitchFamily="34" charset="0"/>
+                <a:latin typeface="Amiri" pitchFamily="2" charset="-78"/>
                 <a:ea typeface="Amiri" pitchFamily="2" charset="-78"/>
                 <a:cs typeface="Amiri" pitchFamily="2" charset="-78"/>
               </a:rPr>
@@ -9588,7 +9588,7 @@
                 <a:solidFill>
                   <a:srgbClr val="FFFFFF"/>
                 </a:solidFill>
-                <a:latin typeface="Calibri" pitchFamily="34" charset="0"/>
+                <a:latin typeface="Amiri" pitchFamily="2" charset="-78"/>
                 <a:ea typeface="Amiri" pitchFamily="2" charset="-78"/>
                 <a:cs typeface="Amiri" pitchFamily="2" charset="-78"/>
               </a:rPr>
@@ -9654,7 +9654,7 @@
                 <a:solidFill>
                   <a:srgbClr val="FFFFFF"/>
                 </a:solidFill>
-                <a:latin typeface="Calibri" pitchFamily="34" charset="0"/>
+                <a:latin typeface="Amiri" pitchFamily="2" charset="-78"/>
                 <a:ea typeface="Amiri" pitchFamily="2" charset="-78"/>
                 <a:cs typeface="Amiri" pitchFamily="2" charset="-78"/>
               </a:rPr>
@@ -9720,7 +9720,7 @@
                 <a:solidFill>
                   <a:srgbClr val="FFFFFF"/>
                 </a:solidFill>
-                <a:latin typeface="Calibri" pitchFamily="34" charset="0"/>
+                <a:latin typeface="Amiri" pitchFamily="2" charset="-78"/>
                 <a:ea typeface="Amiri" pitchFamily="2" charset="-78"/>
                 <a:cs typeface="Amiri" pitchFamily="2" charset="-78"/>
               </a:rPr>
@@ -9786,7 +9786,7 @@
                 <a:solidFill>
                   <a:srgbClr val="FFFFFF"/>
                 </a:solidFill>
-                <a:latin typeface="Calibri" pitchFamily="34" charset="0"/>
+                <a:latin typeface="Amiri" pitchFamily="2" charset="-78"/>
                 <a:ea typeface="Amiri" pitchFamily="2" charset="-78"/>
                 <a:cs typeface="Amiri" pitchFamily="2" charset="-78"/>
               </a:rPr>
@@ -10573,7 +10573,7 @@
                 <a:solidFill>
                   <a:srgbClr val="FFFFFF"/>
                 </a:solidFill>
-                <a:latin typeface="Calibri" pitchFamily="34" charset="0"/>
+                <a:latin typeface="Amiri" pitchFamily="2" charset="-78"/>
                 <a:ea typeface="Amiri" pitchFamily="2" charset="-78"/>
                 <a:cs typeface="Amiri" pitchFamily="2" charset="-78"/>
               </a:rPr>
@@ -10639,7 +10639,7 @@
                 <a:solidFill>
                   <a:srgbClr val="FFFFFF"/>
                 </a:solidFill>
-                <a:latin typeface="Calibri" pitchFamily="34" charset="0"/>
+                <a:latin typeface="Amiri" pitchFamily="2" charset="-78"/>
                 <a:ea typeface="Amiri" pitchFamily="2" charset="-78"/>
                 <a:cs typeface="Amiri" pitchFamily="2" charset="-78"/>
               </a:rPr>
@@ -10705,7 +10705,7 @@
                 <a:solidFill>
                   <a:srgbClr val="FFFFFF"/>
                 </a:solidFill>
-                <a:latin typeface="Calibri" pitchFamily="34" charset="0"/>
+                <a:latin typeface="Amiri" pitchFamily="2" charset="-78"/>
                 <a:ea typeface="Amiri" pitchFamily="2" charset="-78"/>
                 <a:cs typeface="Amiri" pitchFamily="2" charset="-78"/>
               </a:rPr>
@@ -10771,7 +10771,7 @@
                 <a:solidFill>
                   <a:srgbClr val="FFFFFF"/>
                 </a:solidFill>
-                <a:latin typeface="Calibri" pitchFamily="34" charset="0"/>
+                <a:latin typeface="Amiri" pitchFamily="2" charset="-78"/>
                 <a:ea typeface="Amiri" pitchFamily="2" charset="-78"/>
                 <a:cs typeface="Amiri" pitchFamily="2" charset="-78"/>
               </a:rPr>
